--- a/submissions/AISD/AISD_Presentation_2026-10-19.pptx
+++ b/submissions/AISD/AISD_Presentation_2026-10-19.pptx
@@ -465,7 +465,7 @@
           <a:p/>
           <a:p>
             <a:r>
-              <a:t>Open the deck and name the two release tags on screen: the initial release is submission-2026-09-29 at f6fec99, and everything in this deck is read against the tree at dbc0a33.</a:t>
+              <a:t>Open the deck and name the two release tags on screen: the initial release is submission-2026-09-29 at f6fec99, and everything in this deck is read against the tree at f739982, tagged submission-2026-10-20.</a:t>
             </a:r>
           </a:p>
           <a:p>
@@ -753,7 +753,7 @@
           </a:p>
           <a:p>
             <a:r>
-              <a:t>Say that every path on this slide opens at commit dbc0a33, and that the two tags make the before-and-after checkable without trusting the slides.</a:t>
+              <a:t>Say that every path on this slide opens at commit f739982, and that the two tags make the before-and-after checkable without trusting the slides.</a:t>
             </a:r>
           </a:p>
           <a:p>
@@ -2705,7 +2705,7 @@
                 </a:solidFill>
                 <a:latin typeface="Arial"/>
               </a:rPr>
-              <a:t>Current tree      dbc0a33  ·  group 10  ·  draft for second-owner review</a:t>
+              <a:t>Current tree      f739982  ·  tagged submission-2026-10-20  ·  group 10  ·  draft for second-owner review</a:t>
             </a:r>
           </a:p>
         </p:txBody>
@@ -6621,7 +6621,7 @@
                 </a:solidFill>
                 <a:latin typeface="Arial"/>
               </a:rPr>
-              <a:t>Repository paths are relative to the root at dbc0a33; each is linked to the GitHub copy.</a:t>
+              <a:t>Repository paths are relative to the root at f739982; each is linked to the GitHub copy.</a:t>
             </a:r>
           </a:p>
         </p:txBody>
@@ -7727,7 +7727,7 @@
                 <a:latin typeface="Arial"/>
                 <a:hlinkClick r:id="rId13"/>
               </a:rPr>
-              <a:t>github.com/Estrella6066773/HW_AISD/compare/f6fec99...dbc0a33</a:t>
+              <a:t>github.com/Estrella6066773/HW_AISD/compare/f6fec99...f739982</a:t>
             </a:r>
           </a:p>
         </p:txBody>
@@ -7810,7 +7810,7 @@
                 </a:solidFill>
                 <a:latin typeface="Arial"/>
               </a:rPr>
-              <a:t>Initial release   submission-2026-09-29  =  f6fec99     ·     Second release tree  dbc0a33     ·     Group 10, AISD UFCEP6-0-3</a:t>
+              <a:t>Initial release   submission-2026-09-29  =  f6fec99     ·     Second release tree  f739982     ·     Group 10, AISD UFCEP6-0-3</a:t>
             </a:r>
           </a:p>
         </p:txBody>

--- a/submissions/AISD/AISD_Presentation_2026-10-19.pptx
+++ b/submissions/AISD/AISD_Presentation_2026-10-19.pptx
@@ -2705,7 +2705,7 @@
                 </a:solidFill>
                 <a:latin typeface="Arial"/>
               </a:rPr>
-              <a:t>Current tree      f739982  ·  tagged submission-2026-10-20  ·  group 10  ·  draft for second-owner review</a:t>
+              <a:t>Current tree      f739982  ·  tagged submission-2026-10-20  ·  group 10  ·  reviewed by Ruby 2026-10-19</a:t>
             </a:r>
           </a:p>
         </p:txBody>

--- a/submissions/AISD/AISD_Presentation_2026-10-19.pptx
+++ b/submissions/AISD/AISD_Presentation_2026-10-19.pptx
@@ -6825,7 +6825,7 @@
                 <a:latin typeface="Arial"/>
                 <a:hlinkClick r:id="rId2"/>
               </a:rPr>
-              <a:t>submissions/BPMEA/BPMEA_Written_Evaluation.md</a:t>
+              <a:t>submissions/BPMEA/BPMEA_Written_Evaluation.pdf</a:t>
             </a:r>
           </a:p>
         </p:txBody>

--- a/submissions/AISD/AISD_Presentation_2026-10-19.pptx
+++ b/submissions/AISD/AISD_Presentation_2026-10-19.pptx
@@ -465,7 +465,7 @@
           <a:p/>
           <a:p>
             <a:r>
-              <a:t>Open the deck and name the two release tags on screen: the initial release is submission-2026-09-29 at f6fec99, and everything in this deck is read against the tree at f739982, tagged submission-2026-10-20.</a:t>
+              <a:t>Open the deck and name the two release tags on screen: the initial release is submission-2026-09-29 at f6fec99, and everything in this deck is read against the revised release, tagged submission-2026-10-20 (resolve it with git rev-parse submission-2026-10-20^{commit}).</a:t>
             </a:r>
           </a:p>
           <a:p>
@@ -753,7 +753,7 @@
           </a:p>
           <a:p>
             <a:r>
-              <a:t>Say that every path on this slide opens at commit f739982, and that the two tags make the before-and-after checkable without trusting the slides.</a:t>
+              <a:t>Say that every path on this slide opens at the revised release, tagged submission-2026-10-20, and that the two tags make the before-and-after checkable without trusting the slides.</a:t>
             </a:r>
           </a:p>
           <a:p>
@@ -2705,7 +2705,7 @@
                 </a:solidFill>
                 <a:latin typeface="Arial"/>
               </a:rPr>
-              <a:t>Current tree      f739982  ·  tagged submission-2026-10-20  ·  group 10  ·  reviewed by Ruby 2026-10-19</a:t>
+              <a:t>Revised release   submission-2026-10-20  ·  resolve: git rev-parse submission-2026-10-20^{commit}  ·  group 10  ·  reviewed by Ruby 2026-10-19</a:t>
             </a:r>
           </a:p>
         </p:txBody>
@@ -6621,7 +6621,7 @@
                 </a:solidFill>
                 <a:latin typeface="Arial"/>
               </a:rPr>
-              <a:t>Repository paths are relative to the root at f739982; each is linked to the GitHub copy.</a:t>
+              <a:t>Paths are relative to the root of submission-2026-10-20 (git rev-parse submission-2026-10-20^{commit}); each is linked to the GitHub copy.</a:t>
             </a:r>
           </a:p>
         </p:txBody>
@@ -7727,7 +7727,7 @@
                 <a:latin typeface="Arial"/>
                 <a:hlinkClick r:id="rId13"/>
               </a:rPr>
-              <a:t>github.com/Estrella6066773/HW_AISD/compare/f6fec99...f739982</a:t>
+              <a:t>github.com/Estrella6066773/HW_AISD/compare/f6fec99...submission-2026-10-20</a:t>
             </a:r>
           </a:p>
         </p:txBody>
@@ -7810,7 +7810,7 @@
                 </a:solidFill>
                 <a:latin typeface="Arial"/>
               </a:rPr>
-              <a:t>Initial release   submission-2026-09-29  =  f6fec99     ·     Second release tree  f739982     ·     Group 10, AISD UFCEP6-0-3</a:t>
+              <a:t>Initial release   submission-2026-09-29  =  f6fec99     ·     Revised release  submission-2026-10-20     ·     Group 10, AISD UFCEP6-0-3</a:t>
             </a:r>
           </a:p>
         </p:txBody>

--- a/submissions/AISD/AISD_Presentation_2026-10-19.pptx
+++ b/submissions/AISD/AISD_Presentation_2026-10-19.pptx
@@ -1420,7 +1420,7 @@
           </a:p>
           <a:p>
             <a:r>
-              <a:t>Explain the six rows: Group 10 items 1 and 2 were recorded together as F-08 because the original wording is not in the repository.</a:t>
+              <a:t>Explain the six rows: Group 10 items 1 and 2 are recorded separately as F-08a and F-08b, and shown on one row here because one change answers both.</a:t>
             </a:r>
           </a:p>
           <a:p>
@@ -1612,7 +1612,12 @@
           </a:p>
           <a:p>
             <a:r>
-              <a:t>Say what finished: PB-34, PB-39, and the model plus both readable exports. Say what did not: PB-16 unsigned, and AT-03 unchanged even after the V3 re-run.</a:t>
+              <a:t>Say what finished: PB-34, PB-39, the model, both readable exports, and both second-owner reviews (PB-12 on 19 October, PB-16 on 20 October).</a:t>
+            </a:r>
+          </a:p>
+          <a:p>
+            <a:r>
+              <a:t>Say what did not: AT-03 is unchanged even after the V3 re-run.</a:t>
             </a:r>
           </a:p>
           <a:p>
@@ -1622,7 +1627,7 @@
           </a:p>
           <a:p>
             <a:r>
-              <a:t>Be candid that the process records were scheduled last and are correspondingly thin; do not claim a review said something the record does not contain.</a:t>
+              <a:t>Be candid that the process records were scheduled last and were only closed at the 20 October session; name the gaps that remain rather than claiming a review said something the record does not contain.</a:t>
             </a:r>
           </a:p>
         </p:txBody>
@@ -2892,7 +2897,7 @@
                 </a:solidFill>
                 <a:latin typeface="Arial"/>
               </a:rPr>
-              <a:t>Read against the 16 October plan; status checked on 19 October.</a:t>
+              <a:t>Read against the 16 October plan; status checked on 20 October.</a:t>
             </a:r>
           </a:p>
         </p:txBody>
@@ -3297,7 +3302,7 @@
                 </a:solidFill>
                 <a:latin typeface="Arial"/>
               </a:rPr>
-              <a:t>PB-34 done. PB-16 still unsigned: both second-owner reviews are open.</a:t>
+              <a:t>PB-34 done. PB-12’s second-owner review was signed on 19 October and PB-16’s on 20 October, so both reviews are closed.</a:t>
             </a:r>
           </a:p>
         </p:txBody>
@@ -3751,7 +3756,7 @@
                 </a:solidFill>
                 <a:latin typeface="Arial"/>
               </a:rPr>
-              <a:t>Process records were left to the end: Standup 3 has no record, Standup 4 has one row of four, SR3’s fields are blank and SR4 has no date. The deck itself was still listed as “not started” in the plan.</a:t>
+              <a:t>Process records were left to the end and closed only at the 20 October session: Standup 3 stays “Not recorded”, Standup 4 carries one written row and two derived from that day’s commits, SR3 was read back from the increment, and SR4 was recorded on 20 October. The deck itself was still listed as “not started” in the plan.</a:t>
             </a:r>
           </a:p>
           <a:p>
@@ -3770,7 +3775,7 @@
                 </a:solidFill>
                 <a:latin typeface="Arial"/>
               </a:rPr>
-              <a:t>Consequence: the model and the forms moved forward while the evidence and the records stayed at 29 September. That is the gap this deck has to make visible.</a:t>
+              <a:t>Consequence: the model and the forms moved forward while the evidence and the records stayed at 29 September until that session. That is the gap this deck makes visible.</a:t>
             </a:r>
           </a:p>
         </p:txBody>
@@ -16410,7 +16415,7 @@
                 </a:solidFill>
                 <a:latin typeface="Arial"/>
               </a:rPr>
-              <a:t>F-08</a:t>
+              <a:t>F-08a / F-08b</a:t>
             </a:r>
           </a:p>
         </p:txBody>
@@ -17293,7 +17298,7 @@
                 </a:solidFill>
                 <a:latin typeface="Arial"/>
               </a:rPr>
-              <a:t>Seven received items map to six rows because Group 10’s items 1 and 2 share F-08. The record’s other five rows (F-03 to F-07) are the group’s own review points, not outside feedback. Tutor rows are blank because no tutor point exists in writing.</a:t>
+              <a:t>Seven received items map to six rows because Group 10’s items 1 and 2 are recorded as F-08a and F-08b and are shown on one row here: one change answers both. The record’s other five rows (F-03 to F-07) are the group’s own review points, not outside feedback. Tutor rows are blank because no tutor point exists in writing.</a:t>
             </a:r>
           </a:p>
         </p:txBody>
